--- a/dist/초2/사회·역사/마을과공동체/초2_사회·역사_마을과공동체_01_마을의시설.pptx
+++ b/dist/초2/사회·역사/마을과공동체/초2_사회·역사_마을과공동체_01_마을의시설.pptx
@@ -122,13 +122,13 @@
   <p:extLst>
     <p:ext uri="{521415D9-36F7-43E2-AB2F-B90AF26B5E84}">
       <p14:sectionLst xmlns:p14="http://schemas.microsoft.com/office/powerpoint/2010/main">
-        <p14:section name="도입" id="{a966a5d8-d747-5c36-24b3-fb271b33d9a8}">
+        <p14:section name="도입" id="{d9ce5d66-e081-3ec3-b048-cd169992973c}">
           <p14:sldIdLst>
             <p14:sldId id="256"/>
             <p14:sldId id="257"/>
           </p14:sldIdLst>
         </p14:section>
-        <p14:section name="개념" id="{998fa682-887d-8062-6810-02e0d5dba979}">
+        <p14:section name="개념" id="{82b44776-304f-f5a5-f456-27aeddc293d6}">
           <p14:sldIdLst>
             <p14:sldId id="258"/>
             <p14:sldId id="259"/>
@@ -137,7 +137,7 @@
             <p14:sldId id="267"/>
           </p14:sldIdLst>
         </p14:section>
-        <p14:section name="연습" id="{b43179e9-0cee-3bc8-738e-13a8757222a1}">
+        <p14:section name="연습" id="{6deaaf3e-6bbc-a639-c6bc-75ce6d477c1f}">
           <p14:sldIdLst>
             <p14:sldId id="262"/>
             <p14:sldId id="263"/>
@@ -145,28 +145,28 @@
             <p14:sldId id="268"/>
           </p14:sldIdLst>
         </p14:section>
-        <p14:section name="확인" id="{4bdd20d7-ddb2-fdf6-e123-38b05310e46d}">
+        <p14:section name="확인" id="{551358d8-9cfb-5009-7fce-6b2dd79870fe}">
           <p14:sldIdLst>
             <p14:sldId id="265"/>
             <p14:sldId id="266"/>
             <p14:sldId id="269"/>
           </p14:sldIdLst>
         </p14:section>
-        <p14:section name="개념" id="{02e65e1d-62bc-8127-4ebf-610b2fa49e06}">
+        <p14:section name="개념" id="{1da7abad-101b-9f68-4670-8f7e2db85f63}">
           <p14:sldIdLst/>
         </p14:section>
-        <p14:section name="연습" id="{82e29fb6-8eb9-2c20-0df5-91669cc244b0}">
+        <p14:section name="연습" id="{af11c473-35fc-e9be-bd6d-8cbd8c68b526}">
           <p14:sldIdLst/>
         </p14:section>
-        <p14:section name="확인" id="{1a92d025-6f9a-8a60-03aa-c228a063cc19}">
+        <p14:section name="확인" id="{51c45706-3329-c1f6-15fd-d526231f33fc}">
           <p14:sldIdLst/>
         </p14:section>
-        <p14:section name="정리" id="{49485f34-c621-34d2-d0c0-1198b68088b6}">
+        <p14:section name="정리" id="{ff41997b-6cc2-069f-2eeb-767268db396b}">
           <p14:sldIdLst>
             <p14:sldId id="270"/>
           </p14:sldIdLst>
         </p14:section>
-        <p14:section name="보충" id="{6b6ff25b-3d83-7e2f-0d36-acf6dcdcce48}">
+        <p14:section name="보충" id="{bcadb510-ad96-03ab-a3f7-ecee4294f0ef}">
           <p14:sldIdLst>
             <p14:sldId id="271"/>
           </p14:sldIdLst>
@@ -1293,7 +1293,7 @@
 막히면
 - 학교 가는 길에 실제로 장소를 가리키며 “여기는 무엇을 하는 곳일까?”를 묻는 놀이를 합니다.
 주의
-- 이 차시는 계획상 앞 차시가 없습니다. 보충으로도 어려우면 1학년 ‘학교의 장소와 사람들’(KR22-G01-SOC-SCHOOL-L01)과 가까운 내용이므로 그 차시를 먼저 합니다.
+- 보충으로도 어려우면 앞 차시인 1학년 ‘학교의 장소와 사람들’(KR22-G01-SOC-SCHOOL-L01)을 먼저 합니다.
 - 보충이 오래 걸리면 오늘은 여기까지 하고 다음 날 S02부터 다시 시작합니다.</a:t>
             </a:r>
             <a:endParaRPr lang="en-US" dirty="0"/>
@@ -1393,7 +1393,7 @@
 - ③ “다치거나 아플 때 치료해 주는 곳이에요.”
 막히면
 - “어제(지난 주말에) 엄마(아빠)랑 어디 갔었지?”처럼 최근 경험을 짚어 줍니다.
-- 장소 이름을 말하지 못하거나 장소에서 하는 일을 말하기 어려워하면 S16(보충)을 먼저 합니다. 이 차시는 계획상 앞 차시가 없습니다. 보충으로도 어려우면 1학년 ‘학교의 장소와 사람들’(KR22-G01-SOC-SCHOOL-L01)과 가까운 내용이므로 그 차시를 먼저 합니다.
+- 장소 이름을 말하지 못하거나 장소에서 하는 일을 말하기 어려워하면 S16(보충)을 먼저 합니다. 보충으로도 어려우면 앞 차시인 1학년 ‘학교의 장소와 사람들’(KR22-G01-SOC-SCHOOL-L01)을 먼저 합니다.
 주의
 - 편의점, 태권도장, 미용실처럼 무엇이든 괜찮습니다. 오늘 배울 일곱 시설이 아니어도 됩니다.</a:t>
             </a:r>
